--- a/courseware/DSA_CH12_Advanced_Structures.pptx
+++ b/courseware/DSA_CH12_Advanced_Structures.pptx
@@ -3324,7 +3324,7 @@
                 <a:latin typeface="Segoe UI"/>
                 <a:ea typeface="微软雅黑"/>
               </a:rPr>
-              <a:t>现代化重制版讲义　代码按 C++17 重写，全部可编译、可运行</a:t>
+              <a:t>现代化重制版讲义　代码按 C++17 重写；code/ 全部单元双档编译运行通过</a:t>
             </a:r>
           </a:p>
         </p:txBody>
@@ -12916,7 +12916,7 @@
                 <a:latin typeface="Segoe UI"/>
                 <a:ea typeface="微软雅黑"/>
               </a:rPr>
-              <a:t>习题（完整题面与参考答案见同名讲义）</a:t>
+              <a:t>习题选讲</a:t>
             </a:r>
           </a:p>
         </p:txBody>
@@ -12995,11 +12995,11 @@
                 <a:spcPts val="0"/>
               </a:spcBef>
               <a:spcAft>
-                <a:spcPts val="1240"/>
-              </a:spcAft>
-            </a:pPr>
-            <a:r>
-              <a:rPr sz="2000" b="0" i="0">
+                <a:spcPts val="1178"/>
+              </a:spcAft>
+            </a:pPr>
+            <a:r>
+              <a:rPr sz="1900" b="0" i="0">
                 <a:solidFill>
                   <a:srgbClr val="242A33"/>
                 </a:solidFill>
@@ -13009,7 +13009,7 @@
               <a:t>•  </a:t>
             </a:r>
             <a:r>
-              <a:rPr sz="2000" b="1" i="0">
+              <a:rPr sz="1900" b="1" i="0">
                 <a:solidFill>
                   <a:srgbClr val="12395B"/>
                 </a:solidFill>
@@ -13019,7 +13019,7 @@
               <a:t>地址公式</a:t>
             </a:r>
             <a:r>
-              <a:rPr sz="2000" b="0" i="0">
+              <a:rPr sz="1900" b="0" i="0">
                 <a:solidFill>
                   <a:srgbClr val="242A33"/>
                 </a:solidFill>
@@ -13029,7 +13029,7 @@
               <a:t>　</a:t>
             </a:r>
             <a:r>
-              <a:rPr sz="1879" b="0" i="0">
+              <a:rPr sz="1786" b="0" i="0">
                 <a:solidFill>
                   <a:srgbClr val="242A33"/>
                 </a:solidFill>
@@ -13039,7 +13039,7 @@
               <a:t>A[3][4][5]</a:t>
             </a:r>
             <a:r>
-              <a:rPr sz="2000" b="0" i="0">
+              <a:rPr sz="1900" b="0" i="0">
                 <a:solidFill>
                   <a:srgbClr val="242A33"/>
                 </a:solidFill>
@@ -13049,7 +13049,7 @@
               <a:t> 行优先下 </a:t>
             </a:r>
             <a:r>
-              <a:rPr sz="1879" b="0" i="0">
+              <a:rPr sz="1786" b="0" i="0">
                 <a:solidFill>
                   <a:srgbClr val="242A33"/>
                 </a:solidFill>
@@ -13059,7 +13059,7 @@
               <a:t>A[2][1][3]</a:t>
             </a:r>
             <a:r>
-              <a:rPr sz="2000" b="0" i="0">
+              <a:rPr sz="1900" b="0" i="0">
                 <a:solidFill>
                   <a:srgbClr val="242A33"/>
                 </a:solidFill>
@@ -13078,11 +13078,11 @@
                 <a:spcPts val="0"/>
               </a:spcBef>
               <a:spcAft>
-                <a:spcPts val="1240"/>
-              </a:spcAft>
-            </a:pPr>
-            <a:r>
-              <a:rPr sz="2000" b="0" i="0">
+                <a:spcPts val="1178"/>
+              </a:spcAft>
+            </a:pPr>
+            <a:r>
+              <a:rPr sz="1900" b="0" i="0">
                 <a:solidFill>
                   <a:srgbClr val="242A33"/>
                 </a:solidFill>
@@ -13092,7 +13092,7 @@
               <a:t>•  </a:t>
             </a:r>
             <a:r>
-              <a:rPr sz="2000" b="1" i="0">
+              <a:rPr sz="1900" b="1" i="0">
                 <a:solidFill>
                   <a:srgbClr val="12395B"/>
                 </a:solidFill>
@@ -13102,7 +13102,7 @@
               <a:t>特殊矩阵</a:t>
             </a:r>
             <a:r>
-              <a:rPr sz="2000" b="0" i="0">
+              <a:rPr sz="1900" b="0" i="0">
                 <a:solidFill>
                   <a:srgbClr val="242A33"/>
                 </a:solidFill>
@@ -13121,11 +13121,11 @@
                 <a:spcPts val="0"/>
               </a:spcBef>
               <a:spcAft>
-                <a:spcPts val="1240"/>
-              </a:spcAft>
-            </a:pPr>
-            <a:r>
-              <a:rPr sz="2000" b="0" i="0">
+                <a:spcPts val="1178"/>
+              </a:spcAft>
+            </a:pPr>
+            <a:r>
+              <a:rPr sz="1900" b="0" i="0">
                 <a:solidFill>
                   <a:srgbClr val="242A33"/>
                 </a:solidFill>
@@ -13135,7 +13135,7 @@
               <a:t>•  </a:t>
             </a:r>
             <a:r>
-              <a:rPr sz="2000" b="1" i="0">
+              <a:rPr sz="1900" b="1" i="0">
                 <a:solidFill>
                   <a:srgbClr val="12395B"/>
                 </a:solidFill>
@@ -13145,7 +13145,7 @@
               <a:t>稀疏矩阵</a:t>
             </a:r>
             <a:r>
-              <a:rPr sz="2000" b="0" i="0">
+              <a:rPr sz="1900" b="0" i="0">
                 <a:solidFill>
                   <a:srgbClr val="242A33"/>
                 </a:solidFill>
@@ -13164,11 +13164,11 @@
                 <a:spcPts val="0"/>
               </a:spcBef>
               <a:spcAft>
-                <a:spcPts val="1240"/>
-              </a:spcAft>
-            </a:pPr>
-            <a:r>
-              <a:rPr sz="2000" b="0" i="0">
+                <a:spcPts val="1178"/>
+              </a:spcAft>
+            </a:pPr>
+            <a:r>
+              <a:rPr sz="1900" b="0" i="0">
                 <a:solidFill>
                   <a:srgbClr val="242A33"/>
                 </a:solidFill>
@@ -13178,7 +13178,7 @@
               <a:t>•  </a:t>
             </a:r>
             <a:r>
-              <a:rPr sz="2000" b="1" i="0">
+              <a:rPr sz="1900" b="1" i="0">
                 <a:solidFill>
                   <a:srgbClr val="12395B"/>
                 </a:solidFill>
@@ -13188,7 +13188,7 @@
               <a:t>广义表</a:t>
             </a:r>
             <a:r>
-              <a:rPr sz="2000" b="0" i="0">
+              <a:rPr sz="1900" b="0" i="0">
                 <a:solidFill>
                   <a:srgbClr val="242A33"/>
                 </a:solidFill>
@@ -13198,7 +13198,7 @@
               <a:t>　对 </a:t>
             </a:r>
             <a:r>
-              <a:rPr sz="1879" b="0" i="0">
+              <a:rPr sz="1786" b="0" i="0">
                 <a:solidFill>
                   <a:srgbClr val="242A33"/>
                 </a:solidFill>
@@ -13208,7 +13208,7 @@
               <a:t>L = (a, (b, (c)), d)</a:t>
             </a:r>
             <a:r>
-              <a:rPr sz="2000" b="0" i="0">
+              <a:rPr sz="1900" b="0" i="0">
                 <a:solidFill>
                   <a:srgbClr val="242A33"/>
                 </a:solidFill>
@@ -13218,7 +13218,7 @@
               <a:t> 求长度、深度、原子数；写出 </a:t>
             </a:r>
             <a:r>
-              <a:rPr sz="1879" b="0" i="0">
+              <a:rPr sz="1786" b="0" i="0">
                 <a:solidFill>
                   <a:srgbClr val="242A33"/>
                 </a:solidFill>
@@ -13228,7 +13228,7 @@
               <a:t>head</a:t>
             </a:r>
             <a:r>
-              <a:rPr sz="2000" b="0" i="0">
+              <a:rPr sz="1900" b="0" i="0">
                 <a:solidFill>
                   <a:srgbClr val="242A33"/>
                 </a:solidFill>
@@ -13238,7 +13238,7 @@
               <a:t> / </a:t>
             </a:r>
             <a:r>
-              <a:rPr sz="1879" b="0" i="0">
+              <a:rPr sz="1786" b="0" i="0">
                 <a:solidFill>
                   <a:srgbClr val="242A33"/>
                 </a:solidFill>
@@ -13248,7 +13248,7 @@
               <a:t>tail</a:t>
             </a:r>
             <a:r>
-              <a:rPr sz="2000" b="0" i="0">
+              <a:rPr sz="1900" b="0" i="0">
                 <a:solidFill>
                   <a:srgbClr val="242A33"/>
                 </a:solidFill>
@@ -13267,11 +13267,11 @@
                 <a:spcPts val="0"/>
               </a:spcBef>
               <a:spcAft>
-                <a:spcPts val="1240"/>
-              </a:spcAft>
-            </a:pPr>
-            <a:r>
-              <a:rPr sz="2000" b="0" i="0">
+                <a:spcPts val="1178"/>
+              </a:spcAft>
+            </a:pPr>
+            <a:r>
+              <a:rPr sz="1900" b="0" i="0">
                 <a:solidFill>
                   <a:srgbClr val="242A33"/>
                 </a:solidFill>
@@ -13281,7 +13281,7 @@
               <a:t>•  </a:t>
             </a:r>
             <a:r>
-              <a:rPr sz="2000" b="1" i="0">
+              <a:rPr sz="1900" b="1" i="0">
                 <a:solidFill>
                   <a:srgbClr val="12395B"/>
                 </a:solidFill>
@@ -13291,7 +13291,7 @@
               <a:t>垃圾回收</a:t>
             </a:r>
             <a:r>
-              <a:rPr sz="2000" b="0" i="0">
+              <a:rPr sz="1900" b="0" i="0">
                 <a:solidFill>
                   <a:srgbClr val="242A33"/>
                 </a:solidFill>
@@ -13310,11 +13310,11 @@
                 <a:spcPts val="0"/>
               </a:spcBef>
               <a:spcAft>
-                <a:spcPts val="1240"/>
-              </a:spcAft>
-            </a:pPr>
-            <a:r>
-              <a:rPr sz="2000" b="0" i="0">
+                <a:spcPts val="1178"/>
+              </a:spcAft>
+            </a:pPr>
+            <a:r>
+              <a:rPr sz="1900" b="0" i="0">
                 <a:solidFill>
                   <a:srgbClr val="242A33"/>
                 </a:solidFill>
@@ -13324,7 +13324,7 @@
               <a:t>•  </a:t>
             </a:r>
             <a:r>
-              <a:rPr sz="2000" b="1" i="0">
+              <a:rPr sz="1900" b="1" i="0">
                 <a:solidFill>
                   <a:srgbClr val="12395B"/>
                 </a:solidFill>
@@ -13334,7 +13334,7 @@
               <a:t>最佳 BST</a:t>
             </a:r>
             <a:r>
-              <a:rPr sz="2000" b="0" i="0">
+              <a:rPr sz="1900" b="0" i="0">
                 <a:solidFill>
                   <a:srgbClr val="242A33"/>
                 </a:solidFill>
@@ -13344,7 +13344,7 @@
               <a:t>　用动态规划手算 4 个键的最优树；说明 </a:t>
             </a:r>
             <a:r>
-              <a:rPr sz="1879" b="0" i="0">
+              <a:rPr sz="1786" b="0" i="0">
                 <a:solidFill>
                   <a:srgbClr val="242A33"/>
                 </a:solidFill>
@@ -13354,7 +13354,7 @@
               <a:t>root</a:t>
             </a:r>
             <a:r>
-              <a:rPr sz="2000" b="0" i="0">
+              <a:rPr sz="1900" b="0" i="0">
                 <a:solidFill>
                   <a:srgbClr val="242A33"/>
                 </a:solidFill>
@@ -13373,11 +13373,11 @@
                 <a:spcPts val="0"/>
               </a:spcBef>
               <a:spcAft>
-                <a:spcPts val="1240"/>
-              </a:spcAft>
-            </a:pPr>
-            <a:r>
-              <a:rPr sz="2000" b="0" i="0">
+                <a:spcPts val="1178"/>
+              </a:spcAft>
+            </a:pPr>
+            <a:r>
+              <a:rPr sz="1900" b="0" i="0">
                 <a:solidFill>
                   <a:srgbClr val="242A33"/>
                 </a:solidFill>
@@ -13387,7 +13387,7 @@
               <a:t>•  </a:t>
             </a:r>
             <a:r>
-              <a:rPr sz="2000" b="1" i="0">
+              <a:rPr sz="1900" b="1" i="0">
                 <a:solidFill>
                   <a:srgbClr val="12395B"/>
                 </a:solidFill>
@@ -13397,7 +13397,7 @@
               <a:t>AVL</a:t>
             </a:r>
             <a:r>
-              <a:rPr sz="2000" b="0" i="0">
+              <a:rPr sz="1900" b="0" i="0">
                 <a:solidFill>
                   <a:srgbClr val="242A33"/>
                 </a:solidFill>
@@ -13405,6 +13405,79 @@
                 <a:ea typeface="微软雅黑"/>
               </a:rPr>
               <a:t>　依次插入一组键，画出每次旋转后的形状；说明为什么外存索引不用它</a:t>
+            </a:r>
+          </a:p>
+          <a:p>
+            <a:pPr algn="l">
+              <a:lnSpc>
+                <a:spcPct val="132000"/>
+              </a:lnSpc>
+              <a:spcBef>
+                <a:spcPts val="0"/>
+              </a:spcBef>
+              <a:spcAft>
+                <a:spcPts val="1178"/>
+              </a:spcAft>
+            </a:pPr>
+            <a:r>
+              <a:rPr sz="1900" b="0" i="0">
+                <a:solidFill>
+                  <a:srgbClr val="242A33"/>
+                </a:solidFill>
+                <a:latin typeface="Segoe UI"/>
+                <a:ea typeface="微软雅黑"/>
+              </a:rPr>
+              <a:t>•  </a:t>
+            </a:r>
+            <a:r>
+              <a:rPr sz="1900" b="1" i="0">
+                <a:solidFill>
+                  <a:srgbClr val="12395B"/>
+                </a:solidFill>
+                <a:latin typeface="Segoe UI"/>
+                <a:ea typeface="微软雅黑"/>
+              </a:rPr>
+              <a:t>这一页和讲义里都是选讲。</a:t>
+            </a:r>
+            <a:r>
+              <a:rPr sz="1900" b="0" i="0">
+                <a:solidFill>
+                  <a:srgbClr val="242A33"/>
+                </a:solidFill>
+                <a:latin typeface="Segoe UI"/>
+                <a:ea typeface="微软雅黑"/>
+              </a:rPr>
+              <a:t> 原书全部 </a:t>
+            </a:r>
+            <a:r>
+              <a:rPr sz="1900" b="1" i="0">
+                <a:solidFill>
+                  <a:srgbClr val="12395B"/>
+                </a:solidFill>
+                <a:latin typeface="Segoe UI"/>
+                <a:ea typeface="微软雅黑"/>
+              </a:rPr>
+              <a:t>345 道</a:t>
+            </a:r>
+            <a:r>
+              <a:rPr sz="1900" b="0" i="0">
+                <a:solidFill>
+                  <a:srgbClr val="242A33"/>
+                </a:solidFill>
+                <a:latin typeface="Segoe UI"/>
+                <a:ea typeface="微软雅黑"/>
+              </a:rPr>
+              <a:t>习题与上机题的参考答案，在 </a:t>
+            </a:r>
+            <a:r>
+              <a:rPr sz="1786" b="0" i="0">
+                <a:solidFill>
+                  <a:srgbClr val="242A33"/>
+                </a:solidFill>
+                <a:latin typeface="Consolas"/>
+                <a:ea typeface="Consolas"/>
+              </a:rPr>
+              <a:t>book/习题与参考答案.md</a:t>
             </a:r>
           </a:p>
         </p:txBody>
